--- a/Documentation/Title-Phase-Evaluation-Slide-Template.pptx
+++ b/Documentation/Title-Phase-Evaluation-Slide-Template.pptx
@@ -264,7 +264,7 @@
           <a:p>
             <a:fld id="{394CFA23-11E8-4C5D-9D6A-8BF897C03BEE}" type="datetimeFigureOut">
               <a:rPr lang="en-US" smtClean="0"/>
-              <a:t>8/11/2025</a:t>
+              <a:t>8/8/2026</a:t>
             </a:fld>
             <a:endParaRPr lang="en-US"/>
           </a:p>
@@ -468,7 +468,7 @@
               <a:pPr>
                 <a:defRPr/>
               </a:pPr>
-              <a:t>8/11/2025</a:t>
+              <a:t>8/8/2026</a:t>
             </a:fld>
             <a:endParaRPr lang="en-US"/>
           </a:p>
@@ -980,7 +980,7 @@
               <a:pPr>
                 <a:defRPr/>
               </a:pPr>
-              <a:t>8/11/2025</a:t>
+              <a:t>8/8/2026</a:t>
             </a:fld>
             <a:endParaRPr lang="en-US"/>
           </a:p>
@@ -1159,7 +1159,7 @@
               <a:pPr>
                 <a:defRPr/>
               </a:pPr>
-              <a:t>8/11/2025</a:t>
+              <a:t>8/8/2026</a:t>
             </a:fld>
             <a:endParaRPr lang="en-US"/>
           </a:p>
@@ -1348,7 +1348,7 @@
               <a:pPr>
                 <a:defRPr/>
               </a:pPr>
-              <a:t>8/11/2025</a:t>
+              <a:t>8/8/2026</a:t>
             </a:fld>
             <a:endParaRPr lang="en-US"/>
           </a:p>
@@ -1685,7 +1685,7 @@
               <a:pPr>
                 <a:defRPr/>
               </a:pPr>
-              <a:t>8/11/2025</a:t>
+              <a:t>8/8/2026</a:t>
             </a:fld>
             <a:endParaRPr lang="en-US"/>
           </a:p>
@@ -2332,7 +2332,7 @@
               <a:pPr>
                 <a:defRPr/>
               </a:pPr>
-              <a:t>8/11/2025</a:t>
+              <a:t>8/8/2026</a:t>
             </a:fld>
             <a:endParaRPr lang="en-US"/>
           </a:p>
@@ -2706,7 +2706,7 @@
               <a:pPr>
                 <a:defRPr/>
               </a:pPr>
-              <a:t>8/11/2025</a:t>
+              <a:t>8/8/2026</a:t>
             </a:fld>
             <a:endParaRPr lang="en-US"/>
           </a:p>
@@ -2892,7 +2892,7 @@
               <a:pPr>
                 <a:defRPr/>
               </a:pPr>
-              <a:t>8/11/2025</a:t>
+              <a:t>8/8/2026</a:t>
             </a:fld>
             <a:endParaRPr lang="en-US"/>
           </a:p>
@@ -3148,7 +3148,7 @@
               <a:pPr>
                 <a:defRPr/>
               </a:pPr>
-              <a:t>8/11/2025</a:t>
+              <a:t>8/8/2026</a:t>
             </a:fld>
             <a:endParaRPr lang="en-US"/>
           </a:p>
@@ -3444,7 +3444,7 @@
               <a:pPr>
                 <a:defRPr/>
               </a:pPr>
-              <a:t>8/11/2025</a:t>
+              <a:t>8/8/2026</a:t>
             </a:fld>
             <a:endParaRPr lang="en-US"/>
           </a:p>
@@ -3874,7 +3874,7 @@
               <a:pPr>
                 <a:defRPr/>
               </a:pPr>
-              <a:t>8/11/2025</a:t>
+              <a:t>8/8/2026</a:t>
             </a:fld>
             <a:endParaRPr lang="en-US"/>
           </a:p>
@@ -4002,7 +4002,7 @@
               <a:pPr>
                 <a:defRPr/>
               </a:pPr>
-              <a:t>8/11/2025</a:t>
+              <a:t>8/8/2026</a:t>
             </a:fld>
             <a:endParaRPr lang="en-US"/>
           </a:p>
@@ -4108,7 +4108,7 @@
               <a:pPr>
                 <a:defRPr/>
               </a:pPr>
-              <a:t>8/11/2025</a:t>
+              <a:t>8/8/2026</a:t>
             </a:fld>
             <a:endParaRPr lang="en-US"/>
           </a:p>
@@ -4394,7 +4394,7 @@
               <a:pPr>
                 <a:defRPr/>
               </a:pPr>
-              <a:t>8/11/2025</a:t>
+              <a:t>8/8/2026</a:t>
             </a:fld>
             <a:endParaRPr lang="en-US"/>
           </a:p>
@@ -4660,7 +4660,7 @@
               <a:pPr>
                 <a:defRPr/>
               </a:pPr>
-              <a:t>8/11/2025</a:t>
+              <a:t>8/8/2026</a:t>
             </a:fld>
             <a:endParaRPr lang="en-US"/>
           </a:p>
@@ -4882,7 +4882,7 @@
               <a:pPr>
                 <a:defRPr/>
               </a:pPr>
-              <a:t>8/11/2025</a:t>
+              <a:t>8/8/2026</a:t>
             </a:fld>
             <a:endParaRPr lang="en-US"/>
           </a:p>
@@ -5314,7 +5314,7 @@
         <p:spPr>
           <a:xfrm>
             <a:off x="1143000" y="3797432"/>
-            <a:ext cx="4572000" cy="2057400"/>
+            <a:ext cx="4876800" cy="2057400"/>
           </a:xfrm>
         </p:spPr>
         <p:txBody>
@@ -5327,20 +5327,15 @@
               <a:defRPr/>
             </a:pPr>
             <a:r>
-              <a:rPr lang="en-US" sz="2800" b="1" dirty="0">
+              <a:rPr lang="en-US" sz="2800" b="1" dirty="0" err="1">
                 <a:solidFill>
                   <a:schemeClr val="tx1"/>
                 </a:solidFill>
                 <a:latin typeface="Times New Roman" pitchFamily="18" charset="0"/>
                 <a:cs typeface="Times New Roman" pitchFamily="18" charset="0"/>
               </a:rPr>
-              <a:t>Md. Zakir Hossain</a:t>
-            </a:r>
-          </a:p>
-          <a:p>
-            <a:pPr>
-              <a:defRPr/>
-            </a:pPr>
+              <a:t>Jannatul</a:t>
+            </a:r>
             <a:r>
               <a:rPr lang="en-US" sz="2800" b="1" dirty="0">
                 <a:solidFill>
@@ -5349,7 +5344,52 @@
                 <a:latin typeface="Times New Roman" pitchFamily="18" charset="0"/>
                 <a:cs typeface="Times New Roman" pitchFamily="18" charset="0"/>
               </a:rPr>
-              <a:t>161-15-7392</a:t>
+              <a:t> </a:t>
+            </a:r>
+            <a:r>
+              <a:rPr lang="en-US" sz="2800" b="1" dirty="0" err="1">
+                <a:solidFill>
+                  <a:schemeClr val="tx1"/>
+                </a:solidFill>
+                <a:latin typeface="Times New Roman" pitchFamily="18" charset="0"/>
+                <a:cs typeface="Times New Roman" pitchFamily="18" charset="0"/>
+              </a:rPr>
+              <a:t>Ferdaues</a:t>
+            </a:r>
+            <a:r>
+              <a:rPr lang="en-US" sz="2800" b="1" dirty="0">
+                <a:solidFill>
+                  <a:schemeClr val="tx1"/>
+                </a:solidFill>
+                <a:latin typeface="Times New Roman" pitchFamily="18" charset="0"/>
+                <a:cs typeface="Times New Roman" pitchFamily="18" charset="0"/>
+              </a:rPr>
+              <a:t> (232-15-689)</a:t>
+            </a:r>
+          </a:p>
+          <a:p>
+            <a:pPr>
+              <a:defRPr/>
+            </a:pPr>
+            <a:r>
+              <a:rPr lang="en-US" sz="2800" b="1" dirty="0" err="1">
+                <a:solidFill>
+                  <a:schemeClr val="tx1"/>
+                </a:solidFill>
+                <a:latin typeface="Times New Roman" pitchFamily="18" charset="0"/>
+                <a:cs typeface="Times New Roman" pitchFamily="18" charset="0"/>
+              </a:rPr>
+              <a:t>Sabbir</a:t>
+            </a:r>
+            <a:r>
+              <a:rPr lang="en-US" sz="2800" b="1" dirty="0">
+                <a:solidFill>
+                  <a:schemeClr val="tx1"/>
+                </a:solidFill>
+                <a:latin typeface="Times New Roman" pitchFamily="18" charset="0"/>
+                <a:cs typeface="Times New Roman" pitchFamily="18" charset="0"/>
+              </a:rPr>
+              <a:t> Raihan (232-15-382)</a:t>
             </a:r>
           </a:p>
           <a:p>
@@ -5469,8 +5509,19 @@
                 <a:latin typeface="Times New Roman" panose="02020603050405020304" pitchFamily="18" charset="0"/>
                 <a:cs typeface="Times New Roman" panose="02020603050405020304" pitchFamily="18" charset="0"/>
               </a:rPr>
-              <a:t>Dr. Sheak Rashed Haider Noori</a:t>
-            </a:r>
+              <a:t>Lamia </a:t>
+            </a:r>
+            <a:r>
+              <a:rPr lang="en-US" sz="2600" b="1" dirty="0" err="1">
+                <a:latin typeface="Times New Roman" panose="02020603050405020304" pitchFamily="18" charset="0"/>
+                <a:cs typeface="Times New Roman" panose="02020603050405020304" pitchFamily="18" charset="0"/>
+              </a:rPr>
+              <a:t>Rukhsara</a:t>
+            </a:r>
+            <a:endParaRPr lang="en-US" sz="2600" b="1" dirty="0">
+              <a:latin typeface="Times New Roman" panose="02020603050405020304" pitchFamily="18" charset="0"/>
+              <a:cs typeface="Times New Roman" panose="02020603050405020304" pitchFamily="18" charset="0"/>
+            </a:endParaRPr>
           </a:p>
           <a:p>
             <a:r>
@@ -5481,7 +5532,7 @@
                 <a:latin typeface="Times New Roman" panose="02020603050405020304" pitchFamily="18" charset="0"/>
                 <a:cs typeface="Times New Roman" pitchFamily="18" charset="0"/>
               </a:rPr>
-              <a:t>Professor &amp; Head </a:t>
+              <a:t>Lecturer (Senior Scale)</a:t>
             </a:r>
           </a:p>
           <a:p>
@@ -5591,7 +5642,7 @@
         <p:spPr/>
         <p:txBody>
           <a:bodyPr>
-            <a:normAutofit/>
+            <a:normAutofit lnSpcReduction="10000"/>
           </a:bodyPr>
           <a:lstStyle/>
           <a:p>
@@ -5600,39 +5651,60 @@
                 <a:solidFill>
                   <a:schemeClr val="tx1"/>
                 </a:solidFill>
-                <a:latin typeface="Times New Roman" pitchFamily="18" charset="0"/>
+                <a:latin typeface="Times New Roman" panose="02020603050405020304" pitchFamily="18" charset="0"/>
                 <a:cs typeface="Times New Roman" pitchFamily="18" charset="0"/>
               </a:rPr>
-              <a:t> Our main goal is detect whether this product placement is fraud or not by developing a tool.</a:t>
-            </a:r>
-          </a:p>
-          <a:p>
+              <a:t> </a:t>
+            </a:r>
+            <a:r>
+              <a:rPr lang="en-US" dirty="0">
+                <a:solidFill>
+                  <a:schemeClr val="tx1"/>
+                </a:solidFill>
+                <a:latin typeface="Times New Roman" panose="02020603050405020304" pitchFamily="18" charset="0"/>
+                <a:cs typeface="Times New Roman" panose="02020603050405020304" pitchFamily="18" charset="0"/>
+              </a:rPr>
+              <a:t>Our main goal is to develop an explainable AI-based decision-support system that combines country-level human development indicators with individual student characteristics to estimate readiness.</a:t>
+            </a:r>
+            <a:br>
+              <a:rPr lang="en-US" sz="2800" dirty="0">
+                <a:solidFill>
+                  <a:schemeClr val="tx1"/>
+                </a:solidFill>
+                <a:latin typeface="Times New Roman" panose="02020603050405020304" pitchFamily="18" charset="0"/>
+                <a:cs typeface="Times New Roman" panose="02020603050405020304" pitchFamily="18" charset="0"/>
+              </a:rPr>
+            </a:br>
+            <a:br>
+              <a:rPr lang="en-US" sz="2800" dirty="0">
+                <a:solidFill>
+                  <a:schemeClr val="tx1"/>
+                </a:solidFill>
+                <a:latin typeface="Times New Roman" panose="02020603050405020304" pitchFamily="18" charset="0"/>
+                <a:cs typeface="Times New Roman" panose="02020603050405020304" pitchFamily="18" charset="0"/>
+              </a:rPr>
+            </a:br>
+            <a:r>
+              <a:rPr lang="en-US" dirty="0">
+                <a:solidFill>
+                  <a:schemeClr val="tx1"/>
+                </a:solidFill>
+                <a:latin typeface="Times New Roman" panose="02020603050405020304" pitchFamily="18" charset="0"/>
+                <a:cs typeface="Times New Roman" panose="02020603050405020304" pitchFamily="18" charset="0"/>
+              </a:rPr>
+              <a:t>The system also explains which factors most influence each readiness prediction and provides country-level comparison and recommendation support.</a:t>
+            </a:r>
+            <a:br>
+              <a:rPr lang="en-US" sz="2800" dirty="0">
+                <a:latin typeface="Times New Roman" panose="02020603050405020304" pitchFamily="18" charset="0"/>
+                <a:cs typeface="Times New Roman" panose="02020603050405020304" pitchFamily="18" charset="0"/>
+              </a:rPr>
+            </a:br>
             <a:endParaRPr lang="en-US" sz="3000" dirty="0">
               <a:solidFill>
                 <a:schemeClr val="tx1"/>
               </a:solidFill>
-              <a:latin typeface="Times New Roman" pitchFamily="18" charset="0"/>
-              <a:cs typeface="Times New Roman" pitchFamily="18" charset="0"/>
-            </a:endParaRPr>
-          </a:p>
-          <a:p>
-            <a:r>
-              <a:rPr lang="en-US" sz="3000" dirty="0">
-                <a:solidFill>
-                  <a:schemeClr val="tx1"/>
-                </a:solidFill>
-                <a:latin typeface="Times New Roman" pitchFamily="18" charset="0"/>
-                <a:cs typeface="Times New Roman" pitchFamily="18" charset="0"/>
-              </a:rPr>
-              <a:t>Tracking this type of fraudulent posts.</a:t>
-            </a:r>
-          </a:p>
-          <a:p>
-            <a:endParaRPr lang="en-US" sz="3000" dirty="0">
-              <a:solidFill>
-                <a:schemeClr val="tx1"/>
-              </a:solidFill>
-              <a:latin typeface="Times New Roman" pitchFamily="18" charset="0"/>
+              <a:latin typeface="Times New Roman" panose="02020603050405020304" pitchFamily="18" charset="0"/>
               <a:cs typeface="Times New Roman" pitchFamily="18" charset="0"/>
             </a:endParaRPr>
           </a:p>
@@ -5789,26 +5861,33 @@
           <a:lstStyle/>
           <a:p>
             <a:r>
-              <a:rPr lang="en-US" sz="3000" dirty="0">
+              <a:rPr lang="en-US" dirty="0">
                 <a:solidFill>
                   <a:schemeClr val="tx1"/>
                 </a:solidFill>
-                <a:latin typeface="Times New Roman" pitchFamily="18" charset="0"/>
-                <a:cs typeface="Times New Roman" pitchFamily="18" charset="0"/>
-              </a:rPr>
-              <a:t>Possibilities of placing fake product and create fake hype.</a:t>
-            </a:r>
-          </a:p>
-          <a:p>
-            <a:r>
-              <a:rPr lang="en-US" sz="3000" dirty="0">
+                <a:latin typeface="Times New Roman" panose="02020603050405020304" pitchFamily="18" charset="0"/>
+                <a:cs typeface="Times New Roman" panose="02020603050405020304" pitchFamily="18" charset="0"/>
+              </a:rPr>
+              <a:t>Human development is multidimensional, but country-level HDI alone cannot explain an individual's educational, health, language, stress, and financial circumstances.</a:t>
+            </a:r>
+            <a:br>
+              <a:rPr lang="en-US" sz="2800" dirty="0">
                 <a:solidFill>
                   <a:schemeClr val="tx1"/>
                 </a:solidFill>
-                <a:latin typeface="Times New Roman" pitchFamily="18" charset="0"/>
-                <a:cs typeface="Times New Roman" pitchFamily="18" charset="0"/>
-              </a:rPr>
-              <a:t>Actually these type of problems occur almost daily. Till now there are  very few works regarding this problem. So we thought there might be a good scope for us researching this problem.</a:t>
+                <a:latin typeface="Times New Roman" panose="02020603050405020304" pitchFamily="18" charset="0"/>
+                <a:cs typeface="Times New Roman" panose="02020603050405020304" pitchFamily="18" charset="0"/>
+              </a:rPr>
+            </a:br>
+            <a:r>
+              <a:rPr lang="en-US" dirty="0">
+                <a:solidFill>
+                  <a:schemeClr val="tx1"/>
+                </a:solidFill>
+                <a:latin typeface="Times New Roman" panose="02020603050405020304" pitchFamily="18" charset="0"/>
+                <a:cs typeface="Times New Roman" panose="02020603050405020304" pitchFamily="18" charset="0"/>
+              </a:rPr>
+              <a:t>Students and early-career professionals need more personalized decision support. We therefore identified an opportunity to connect global human-development context with machine learning and explainable predictions in one accessible platform.</a:t>
             </a:r>
           </a:p>
         </p:txBody>
@@ -6029,10 +6108,131 @@
         </p:nvSpPr>
         <p:spPr/>
         <p:txBody>
-          <a:bodyPr/>
-          <a:lstStyle/>
-          <a:p>
-            <a:endParaRPr lang="en-US"/>
+          <a:bodyPr>
+            <a:normAutofit fontScale="85000" lnSpcReduction="10000"/>
+          </a:bodyPr>
+          <a:lstStyle/>
+          <a:p>
+            <a:r>
+              <a:rPr lang="en-US" dirty="0">
+                <a:solidFill>
+                  <a:schemeClr val="tx1"/>
+                </a:solidFill>
+                <a:latin typeface="Times New Roman" panose="02020603050405020304" pitchFamily="18" charset="0"/>
+                <a:cs typeface="Times New Roman" panose="02020603050405020304" pitchFamily="18" charset="0"/>
+              </a:rPr>
+              <a:t>HDI summarizes health, education, and standard of living at country level.</a:t>
+            </a:r>
+          </a:p>
+          <a:p>
+            <a:r>
+              <a:rPr lang="en-US" dirty="0">
+                <a:solidFill>
+                  <a:schemeClr val="tx1"/>
+                </a:solidFill>
+                <a:latin typeface="Times New Roman" panose="02020603050405020304" pitchFamily="18" charset="0"/>
+                <a:cs typeface="Times New Roman" panose="02020603050405020304" pitchFamily="18" charset="0"/>
+              </a:rPr>
+              <a:t>The project combines </a:t>
+            </a:r>
+            <a:r>
+              <a:rPr lang="en-US" dirty="0" err="1">
+                <a:solidFill>
+                  <a:schemeClr val="tx1"/>
+                </a:solidFill>
+                <a:latin typeface="Times New Roman" panose="02020603050405020304" pitchFamily="18" charset="0"/>
+                <a:cs typeface="Times New Roman" panose="02020603050405020304" pitchFamily="18" charset="0"/>
+              </a:rPr>
+              <a:t>Country_HDI</a:t>
+            </a:r>
+            <a:r>
+              <a:rPr lang="en-US" dirty="0">
+                <a:solidFill>
+                  <a:schemeClr val="tx1"/>
+                </a:solidFill>
+                <a:latin typeface="Times New Roman" panose="02020603050405020304" pitchFamily="18" charset="0"/>
+                <a:cs typeface="Times New Roman" panose="02020603050405020304" pitchFamily="18" charset="0"/>
+              </a:rPr>
+              <a:t> and </a:t>
+            </a:r>
+            <a:r>
+              <a:rPr lang="en-US" dirty="0" err="1">
+                <a:solidFill>
+                  <a:schemeClr val="tx1"/>
+                </a:solidFill>
+                <a:latin typeface="Times New Roman" panose="02020603050405020304" pitchFamily="18" charset="0"/>
+                <a:cs typeface="Times New Roman" panose="02020603050405020304" pitchFamily="18" charset="0"/>
+              </a:rPr>
+              <a:t>Country_Life_Expectancy</a:t>
+            </a:r>
+            <a:r>
+              <a:rPr lang="en-US" dirty="0">
+                <a:solidFill>
+                  <a:schemeClr val="tx1"/>
+                </a:solidFill>
+                <a:latin typeface="Times New Roman" panose="02020603050405020304" pitchFamily="18" charset="0"/>
+                <a:cs typeface="Times New Roman" panose="02020603050405020304" pitchFamily="18" charset="0"/>
+              </a:rPr>
+              <a:t> with individual student attributes.</a:t>
+            </a:r>
+          </a:p>
+          <a:p>
+            <a:r>
+              <a:rPr lang="en-US" dirty="0">
+                <a:solidFill>
+                  <a:schemeClr val="tx1"/>
+                </a:solidFill>
+                <a:latin typeface="Times New Roman" panose="02020603050405020304" pitchFamily="18" charset="0"/>
+                <a:cs typeface="Times New Roman" panose="02020603050405020304" pitchFamily="18" charset="0"/>
+              </a:rPr>
+              <a:t>Student dataset: 55,000 records and 11 variables.</a:t>
+            </a:r>
+          </a:p>
+          <a:p>
+            <a:r>
+              <a:rPr lang="en-US" dirty="0">
+                <a:solidFill>
+                  <a:schemeClr val="tx1"/>
+                </a:solidFill>
+                <a:latin typeface="Times New Roman" panose="02020603050405020304" pitchFamily="18" charset="0"/>
+                <a:cs typeface="Times New Roman" panose="02020603050405020304" pitchFamily="18" charset="0"/>
+              </a:rPr>
+              <a:t> Key variables include education, field of study, language proficiency, health, stress, earnings/savings, and readiness score.</a:t>
+            </a:r>
+          </a:p>
+          <a:p>
+            <a:r>
+              <a:rPr lang="en-US" dirty="0">
+                <a:solidFill>
+                  <a:schemeClr val="tx1"/>
+                </a:solidFill>
+                <a:latin typeface="Times New Roman" panose="02020603050405020304" pitchFamily="18" charset="0"/>
+                <a:cs typeface="Times New Roman" panose="02020603050405020304" pitchFamily="18" charset="0"/>
+              </a:rPr>
+              <a:t> Candidate models: Linear Regression, Ridge, KNN, Random Forest, and Gradient Boosting.</a:t>
+            </a:r>
+          </a:p>
+          <a:p>
+            <a:r>
+              <a:rPr lang="en-US" dirty="0" err="1">
+                <a:solidFill>
+                  <a:schemeClr val="tx1"/>
+                </a:solidFill>
+                <a:latin typeface="Times New Roman" panose="02020603050405020304" pitchFamily="18" charset="0"/>
+                <a:cs typeface="Times New Roman" panose="02020603050405020304" pitchFamily="18" charset="0"/>
+              </a:rPr>
+              <a:t>Explainability</a:t>
+            </a:r>
+            <a:r>
+              <a:rPr lang="en-US" dirty="0">
+                <a:solidFill>
+                  <a:schemeClr val="tx1"/>
+                </a:solidFill>
+                <a:latin typeface="Times New Roman" panose="02020603050405020304" pitchFamily="18" charset="0"/>
+                <a:cs typeface="Times New Roman" panose="02020603050405020304" pitchFamily="18" charset="0"/>
+              </a:rPr>
+              <a:t> is implemented through feature-wise prediction sensitivity.</a:t>
+            </a:r>
           </a:p>
         </p:txBody>
       </p:sp>
@@ -6187,10 +6387,113 @@
         </p:nvSpPr>
         <p:spPr/>
         <p:txBody>
-          <a:bodyPr/>
-          <a:lstStyle/>
-          <a:p>
-            <a:endParaRPr lang="en-US"/>
+          <a:bodyPr>
+            <a:normAutofit lnSpcReduction="10000"/>
+          </a:bodyPr>
+          <a:lstStyle/>
+          <a:p>
+            <a:pPr marL="0" indent="0">
+              <a:buNone/>
+            </a:pPr>
+            <a:r>
+              <a:rPr lang="en-US" sz="2800" dirty="0">
+                <a:solidFill>
+                  <a:schemeClr val="tx1"/>
+                </a:solidFill>
+                <a:latin typeface="Times New Roman" panose="02020603050405020304" pitchFamily="18" charset="0"/>
+                <a:cs typeface="Times New Roman" panose="02020603050405020304" pitchFamily="18" charset="0"/>
+              </a:rPr>
+              <a:t>• Traditional HDI is primarily a country-level aggregate and does not provide individual readiness estimates.</a:t>
+            </a:r>
+            <a:br>
+              <a:rPr lang="en-US" sz="2800" dirty="0">
+                <a:solidFill>
+                  <a:schemeClr val="tx1"/>
+                </a:solidFill>
+                <a:latin typeface="Times New Roman" panose="02020603050405020304" pitchFamily="18" charset="0"/>
+                <a:cs typeface="Times New Roman" panose="02020603050405020304" pitchFamily="18" charset="0"/>
+              </a:rPr>
+            </a:br>
+            <a:r>
+              <a:rPr lang="en-US" sz="2800" dirty="0">
+                <a:solidFill>
+                  <a:schemeClr val="tx1"/>
+                </a:solidFill>
+                <a:latin typeface="Times New Roman" panose="02020603050405020304" pitchFamily="18" charset="0"/>
+                <a:cs typeface="Times New Roman" panose="02020603050405020304" pitchFamily="18" charset="0"/>
+              </a:rPr>
+              <a:t>• Many predictive systems provide a score without showing why the prediction was produced.</a:t>
+            </a:r>
+            <a:br>
+              <a:rPr lang="en-US" sz="2800" dirty="0">
+                <a:solidFill>
+                  <a:schemeClr val="tx1"/>
+                </a:solidFill>
+                <a:latin typeface="Times New Roman" panose="02020603050405020304" pitchFamily="18" charset="0"/>
+                <a:cs typeface="Times New Roman" panose="02020603050405020304" pitchFamily="18" charset="0"/>
+              </a:rPr>
+            </a:br>
+            <a:r>
+              <a:rPr lang="en-US" sz="2800" dirty="0">
+                <a:solidFill>
+                  <a:schemeClr val="tx1"/>
+                </a:solidFill>
+                <a:latin typeface="Times New Roman" panose="02020603050405020304" pitchFamily="18" charset="0"/>
+                <a:cs typeface="Times New Roman" panose="02020603050405020304" pitchFamily="18" charset="0"/>
+              </a:rPr>
+              <a:t>• Existing development dashboards and ML models are often separated rather than integrated.</a:t>
+            </a:r>
+            <a:br>
+              <a:rPr lang="en-US" sz="2800" dirty="0">
+                <a:solidFill>
+                  <a:schemeClr val="tx1"/>
+                </a:solidFill>
+                <a:latin typeface="Times New Roman" panose="02020603050405020304" pitchFamily="18" charset="0"/>
+                <a:cs typeface="Times New Roman" panose="02020603050405020304" pitchFamily="18" charset="0"/>
+              </a:rPr>
+            </a:br>
+            <a:r>
+              <a:rPr lang="en-US" sz="2800" dirty="0">
+                <a:solidFill>
+                  <a:schemeClr val="tx1"/>
+                </a:solidFill>
+                <a:latin typeface="Times New Roman" panose="02020603050405020304" pitchFamily="18" charset="0"/>
+                <a:cs typeface="Times New Roman" panose="02020603050405020304" pitchFamily="18" charset="0"/>
+              </a:rPr>
+              <a:t>• Our proposed system connects development context, personal attributes, prediction, explanation, and web-based decision support.</a:t>
+            </a:r>
+            <a:br>
+              <a:rPr lang="en-US" sz="2800" dirty="0">
+                <a:solidFill>
+                  <a:schemeClr val="tx1"/>
+                </a:solidFill>
+                <a:latin typeface="Times New Roman" panose="02020603050405020304" pitchFamily="18" charset="0"/>
+                <a:cs typeface="Times New Roman" panose="02020603050405020304" pitchFamily="18" charset="0"/>
+              </a:rPr>
+            </a:br>
+            <a:r>
+              <a:rPr lang="en-US" sz="2800" dirty="0">
+                <a:solidFill>
+                  <a:schemeClr val="tx1"/>
+                </a:solidFill>
+                <a:latin typeface="Times New Roman" panose="02020603050405020304" pitchFamily="18" charset="0"/>
+                <a:cs typeface="Times New Roman" panose="02020603050405020304" pitchFamily="18" charset="0"/>
+              </a:rPr>
+              <a:t>• The project also includes a repeatable data-refresh and model-update workflow.</a:t>
+            </a:r>
+            <a:endParaRPr lang="en-US" sz="2800" b="1" dirty="0">
+              <a:solidFill>
+                <a:schemeClr val="tx1"/>
+              </a:solidFill>
+              <a:latin typeface="Times New Roman" panose="02020603050405020304" pitchFamily="18" charset="0"/>
+              <a:cs typeface="Times New Roman" panose="02020603050405020304" pitchFamily="18" charset="0"/>
+            </a:endParaRPr>
+          </a:p>
+          <a:p>
+            <a:endParaRPr lang="en-US" sz="2800" dirty="0">
+              <a:latin typeface="Times New Roman" panose="02020603050405020304" pitchFamily="18" charset="0"/>
+              <a:cs typeface="Times New Roman" panose="02020603050405020304" pitchFamily="18" charset="0"/>
+            </a:endParaRPr>
           </a:p>
         </p:txBody>
       </p:sp>
@@ -6345,10 +6648,274 @@
         </p:nvSpPr>
         <p:spPr/>
         <p:txBody>
-          <a:bodyPr/>
-          <a:lstStyle/>
-          <a:p>
-            <a:endParaRPr lang="en-US"/>
+          <a:bodyPr>
+            <a:normAutofit fontScale="70000" lnSpcReduction="20000"/>
+          </a:bodyPr>
+          <a:lstStyle/>
+          <a:p>
+            <a:r>
+              <a:rPr lang="en-US" dirty="0">
+                <a:solidFill>
+                  <a:schemeClr val="tx1"/>
+                </a:solidFill>
+                <a:latin typeface="Times New Roman" panose="02020603050405020304" pitchFamily="18" charset="0"/>
+                <a:cs typeface="Times New Roman" panose="02020603050405020304" pitchFamily="18" charset="0"/>
+              </a:rPr>
+              <a:t>1. Data Collection &amp; Validation</a:t>
+            </a:r>
+            <a:br>
+              <a:rPr lang="en-US" dirty="0">
+                <a:solidFill>
+                  <a:schemeClr val="tx1"/>
+                </a:solidFill>
+                <a:latin typeface="Times New Roman" panose="02020603050405020304" pitchFamily="18" charset="0"/>
+                <a:cs typeface="Times New Roman" panose="02020603050405020304" pitchFamily="18" charset="0"/>
+              </a:rPr>
+            </a:br>
+            <a:r>
+              <a:rPr lang="en-US" dirty="0">
+                <a:solidFill>
+                  <a:schemeClr val="tx1"/>
+                </a:solidFill>
+                <a:latin typeface="Times New Roman" panose="02020603050405020304" pitchFamily="18" charset="0"/>
+                <a:cs typeface="Times New Roman" panose="02020603050405020304" pitchFamily="18" charset="0"/>
+              </a:rPr>
+              <a:t>   • Student readiness dataset + country HDI/life expectancy data</a:t>
+            </a:r>
+            <a:br>
+              <a:rPr lang="en-US" dirty="0">
+                <a:solidFill>
+                  <a:schemeClr val="tx1"/>
+                </a:solidFill>
+                <a:latin typeface="Times New Roman" panose="02020603050405020304" pitchFamily="18" charset="0"/>
+                <a:cs typeface="Times New Roman" panose="02020603050405020304" pitchFamily="18" charset="0"/>
+              </a:rPr>
+            </a:br>
+            <a:r>
+              <a:rPr lang="en-US" dirty="0">
+                <a:solidFill>
+                  <a:schemeClr val="tx1"/>
+                </a:solidFill>
+                <a:latin typeface="Times New Roman" panose="02020603050405020304" pitchFamily="18" charset="0"/>
+                <a:cs typeface="Times New Roman" panose="02020603050405020304" pitchFamily="18" charset="0"/>
+              </a:rPr>
+              <a:t>2. Preprocessing &amp; EDA</a:t>
+            </a:r>
+            <a:br>
+              <a:rPr lang="en-US" dirty="0">
+                <a:solidFill>
+                  <a:schemeClr val="tx1"/>
+                </a:solidFill>
+                <a:latin typeface="Times New Roman" panose="02020603050405020304" pitchFamily="18" charset="0"/>
+                <a:cs typeface="Times New Roman" panose="02020603050405020304" pitchFamily="18" charset="0"/>
+              </a:rPr>
+            </a:br>
+            <a:r>
+              <a:rPr lang="en-US" dirty="0">
+                <a:solidFill>
+                  <a:schemeClr val="tx1"/>
+                </a:solidFill>
+                <a:latin typeface="Times New Roman" panose="02020603050405020304" pitchFamily="18" charset="0"/>
+                <a:cs typeface="Times New Roman" panose="02020603050405020304" pitchFamily="18" charset="0"/>
+              </a:rPr>
+              <a:t>   • Cleaning, encoding, scaling, visualization, correlation analysis</a:t>
+            </a:r>
+            <a:br>
+              <a:rPr lang="en-US" dirty="0">
+                <a:solidFill>
+                  <a:schemeClr val="tx1"/>
+                </a:solidFill>
+                <a:latin typeface="Times New Roman" panose="02020603050405020304" pitchFamily="18" charset="0"/>
+                <a:cs typeface="Times New Roman" panose="02020603050405020304" pitchFamily="18" charset="0"/>
+              </a:rPr>
+            </a:br>
+            <a:r>
+              <a:rPr lang="en-US" dirty="0">
+                <a:solidFill>
+                  <a:schemeClr val="tx1"/>
+                </a:solidFill>
+                <a:latin typeface="Times New Roman" panose="02020603050405020304" pitchFamily="18" charset="0"/>
+                <a:cs typeface="Times New Roman" panose="02020603050405020304" pitchFamily="18" charset="0"/>
+              </a:rPr>
+              <a:t>3. Model Development</a:t>
+            </a:r>
+            <a:br>
+              <a:rPr lang="en-US" dirty="0">
+                <a:solidFill>
+                  <a:schemeClr val="tx1"/>
+                </a:solidFill>
+                <a:latin typeface="Times New Roman" panose="02020603050405020304" pitchFamily="18" charset="0"/>
+                <a:cs typeface="Times New Roman" panose="02020603050405020304" pitchFamily="18" charset="0"/>
+              </a:rPr>
+            </a:br>
+            <a:r>
+              <a:rPr lang="en-US" dirty="0">
+                <a:solidFill>
+                  <a:schemeClr val="tx1"/>
+                </a:solidFill>
+                <a:latin typeface="Times New Roman" panose="02020603050405020304" pitchFamily="18" charset="0"/>
+                <a:cs typeface="Times New Roman" panose="02020603050405020304" pitchFamily="18" charset="0"/>
+              </a:rPr>
+              <a:t>   • Compare Linear, Ridge, KNN, Random Forest, Gradient Boosting</a:t>
+            </a:r>
+            <a:br>
+              <a:rPr lang="en-US" dirty="0">
+                <a:solidFill>
+                  <a:schemeClr val="tx1"/>
+                </a:solidFill>
+                <a:latin typeface="Times New Roman" panose="02020603050405020304" pitchFamily="18" charset="0"/>
+                <a:cs typeface="Times New Roman" panose="02020603050405020304" pitchFamily="18" charset="0"/>
+              </a:rPr>
+            </a:br>
+            <a:r>
+              <a:rPr lang="en-US" dirty="0">
+                <a:solidFill>
+                  <a:schemeClr val="tx1"/>
+                </a:solidFill>
+                <a:latin typeface="Times New Roman" panose="02020603050405020304" pitchFamily="18" charset="0"/>
+                <a:cs typeface="Times New Roman" panose="02020603050405020304" pitchFamily="18" charset="0"/>
+              </a:rPr>
+              <a:t>4. Model Selection</a:t>
+            </a:r>
+            <a:br>
+              <a:rPr lang="en-US" dirty="0">
+                <a:solidFill>
+                  <a:schemeClr val="tx1"/>
+                </a:solidFill>
+                <a:latin typeface="Times New Roman" panose="02020603050405020304" pitchFamily="18" charset="0"/>
+                <a:cs typeface="Times New Roman" panose="02020603050405020304" pitchFamily="18" charset="0"/>
+              </a:rPr>
+            </a:br>
+            <a:r>
+              <a:rPr lang="en-US" dirty="0">
+                <a:solidFill>
+                  <a:schemeClr val="tx1"/>
+                </a:solidFill>
+                <a:latin typeface="Times New Roman" panose="02020603050405020304" pitchFamily="18" charset="0"/>
+                <a:cs typeface="Times New Roman" panose="02020603050405020304" pitchFamily="18" charset="0"/>
+              </a:rPr>
+              <a:t>   • RMSE, MAE, and R²</a:t>
+            </a:r>
+            <a:br>
+              <a:rPr lang="en-US" dirty="0">
+                <a:solidFill>
+                  <a:schemeClr val="tx1"/>
+                </a:solidFill>
+                <a:latin typeface="Times New Roman" panose="02020603050405020304" pitchFamily="18" charset="0"/>
+                <a:cs typeface="Times New Roman" panose="02020603050405020304" pitchFamily="18" charset="0"/>
+              </a:rPr>
+            </a:br>
+            <a:r>
+              <a:rPr lang="en-US" dirty="0">
+                <a:solidFill>
+                  <a:schemeClr val="tx1"/>
+                </a:solidFill>
+                <a:latin typeface="Times New Roman" panose="02020603050405020304" pitchFamily="18" charset="0"/>
+                <a:cs typeface="Times New Roman" panose="02020603050405020304" pitchFamily="18" charset="0"/>
+              </a:rPr>
+              <a:t>5. Explainable AI</a:t>
+            </a:r>
+            <a:br>
+              <a:rPr lang="en-US" dirty="0">
+                <a:solidFill>
+                  <a:schemeClr val="tx1"/>
+                </a:solidFill>
+                <a:latin typeface="Times New Roman" panose="02020603050405020304" pitchFamily="18" charset="0"/>
+                <a:cs typeface="Times New Roman" panose="02020603050405020304" pitchFamily="18" charset="0"/>
+              </a:rPr>
+            </a:br>
+            <a:r>
+              <a:rPr lang="en-US" dirty="0">
+                <a:solidFill>
+                  <a:schemeClr val="tx1"/>
+                </a:solidFill>
+                <a:latin typeface="Times New Roman" panose="02020603050405020304" pitchFamily="18" charset="0"/>
+                <a:cs typeface="Times New Roman" panose="02020603050405020304" pitchFamily="18" charset="0"/>
+              </a:rPr>
+              <a:t>   • Occlusion/sensitivity-based feature contribution</a:t>
+            </a:r>
+            <a:br>
+              <a:rPr lang="en-US" dirty="0">
+                <a:solidFill>
+                  <a:schemeClr val="tx1"/>
+                </a:solidFill>
+                <a:latin typeface="Times New Roman" panose="02020603050405020304" pitchFamily="18" charset="0"/>
+                <a:cs typeface="Times New Roman" panose="02020603050405020304" pitchFamily="18" charset="0"/>
+              </a:rPr>
+            </a:br>
+            <a:r>
+              <a:rPr lang="en-US" dirty="0">
+                <a:solidFill>
+                  <a:schemeClr val="tx1"/>
+                </a:solidFill>
+                <a:latin typeface="Times New Roman" panose="02020603050405020304" pitchFamily="18" charset="0"/>
+                <a:cs typeface="Times New Roman" panose="02020603050405020304" pitchFamily="18" charset="0"/>
+              </a:rPr>
+              <a:t>6. Deployment</a:t>
+            </a:r>
+            <a:br>
+              <a:rPr lang="en-US" dirty="0">
+                <a:solidFill>
+                  <a:schemeClr val="tx1"/>
+                </a:solidFill>
+                <a:latin typeface="Times New Roman" panose="02020603050405020304" pitchFamily="18" charset="0"/>
+                <a:cs typeface="Times New Roman" panose="02020603050405020304" pitchFamily="18" charset="0"/>
+              </a:rPr>
+            </a:br>
+            <a:r>
+              <a:rPr lang="en-US" dirty="0">
+                <a:solidFill>
+                  <a:schemeClr val="tx1"/>
+                </a:solidFill>
+                <a:latin typeface="Times New Roman" panose="02020603050405020304" pitchFamily="18" charset="0"/>
+                <a:cs typeface="Times New Roman" panose="02020603050405020304" pitchFamily="18" charset="0"/>
+              </a:rPr>
+              <a:t>   • Flask REST API + web frontend</a:t>
+            </a:r>
+            <a:br>
+              <a:rPr lang="en-US" dirty="0">
+                <a:solidFill>
+                  <a:schemeClr val="tx1"/>
+                </a:solidFill>
+                <a:latin typeface="Times New Roman" panose="02020603050405020304" pitchFamily="18" charset="0"/>
+                <a:cs typeface="Times New Roman" panose="02020603050405020304" pitchFamily="18" charset="0"/>
+              </a:rPr>
+            </a:br>
+            <a:r>
+              <a:rPr lang="en-US" dirty="0">
+                <a:solidFill>
+                  <a:schemeClr val="tx1"/>
+                </a:solidFill>
+                <a:latin typeface="Times New Roman" panose="02020603050405020304" pitchFamily="18" charset="0"/>
+                <a:cs typeface="Times New Roman" panose="02020603050405020304" pitchFamily="18" charset="0"/>
+              </a:rPr>
+              <a:t>7. Automation</a:t>
+            </a:r>
+            <a:br>
+              <a:rPr lang="en-US" dirty="0">
+                <a:solidFill>
+                  <a:schemeClr val="tx1"/>
+                </a:solidFill>
+                <a:latin typeface="Times New Roman" panose="02020603050405020304" pitchFamily="18" charset="0"/>
+                <a:cs typeface="Times New Roman" panose="02020603050405020304" pitchFamily="18" charset="0"/>
+              </a:rPr>
+            </a:br>
+            <a:r>
+              <a:rPr lang="en-US" dirty="0">
+                <a:solidFill>
+                  <a:schemeClr val="tx1"/>
+                </a:solidFill>
+                <a:latin typeface="Times New Roman" panose="02020603050405020304" pitchFamily="18" charset="0"/>
+                <a:cs typeface="Times New Roman" panose="02020603050405020304" pitchFamily="18" charset="0"/>
+              </a:rPr>
+              <a:t>   • Weekly data refresh and model retraining via GitHub Actions</a:t>
+            </a:r>
+          </a:p>
+          <a:p>
+            <a:pPr marL="0" indent="0">
+              <a:buNone/>
+            </a:pPr>
+            <a:endParaRPr lang="en-US" dirty="0"/>
           </a:p>
         </p:txBody>
       </p:sp>
@@ -6438,35 +7005,42 @@
           <a:lstStyle/>
           <a:p>
             <a:r>
-              <a:rPr lang="en-US" sz="3000" dirty="0">
+              <a:rPr lang="en-US" sz="2800" dirty="0">
                 <a:solidFill>
                   <a:schemeClr val="tx1"/>
                 </a:solidFill>
-                <a:latin typeface="Times New Roman" pitchFamily="18" charset="0"/>
-                <a:cs typeface="Times New Roman" pitchFamily="18" charset="0"/>
-              </a:rPr>
-              <a:t>our tool will make sure that this type of advertisement or post will not appear to user.</a:t>
-            </a:r>
-          </a:p>
-          <a:p>
-            <a:endParaRPr lang="en-US" sz="3000" dirty="0">
-              <a:solidFill>
-                <a:schemeClr val="tx1"/>
-              </a:solidFill>
-              <a:latin typeface="Times New Roman" pitchFamily="18" charset="0"/>
-              <a:cs typeface="Times New Roman" pitchFamily="18" charset="0"/>
-            </a:endParaRPr>
-          </a:p>
-          <a:p>
-            <a:r>
-              <a:rPr lang="en-US" sz="3000" dirty="0">
+                <a:latin typeface="Times New Roman" panose="02020603050405020304" pitchFamily="18" charset="0"/>
+                <a:cs typeface="Times New Roman" panose="02020603050405020304" pitchFamily="18" charset="0"/>
+              </a:rPr>
+              <a:t>The system will provide an estimated readiness score using human-development context and individual-level characteristics.</a:t>
+            </a:r>
+            <a:br>
+              <a:rPr lang="en-US" sz="2800" dirty="0">
                 <a:solidFill>
                   <a:schemeClr val="tx1"/>
                 </a:solidFill>
-                <a:latin typeface="Times New Roman" pitchFamily="18" charset="0"/>
-                <a:cs typeface="Times New Roman" pitchFamily="18" charset="0"/>
-              </a:rPr>
-              <a:t>automatically report to Facebook about these page or person after attempting this for several times.</a:t>
+                <a:latin typeface="Times New Roman" panose="02020603050405020304" pitchFamily="18" charset="0"/>
+                <a:cs typeface="Times New Roman" panose="02020603050405020304" pitchFamily="18" charset="0"/>
+              </a:rPr>
+            </a:br>
+            <a:br>
+              <a:rPr lang="en-US" sz="2800" dirty="0">
+                <a:solidFill>
+                  <a:schemeClr val="tx1"/>
+                </a:solidFill>
+                <a:latin typeface="Times New Roman" panose="02020603050405020304" pitchFamily="18" charset="0"/>
+                <a:cs typeface="Times New Roman" panose="02020603050405020304" pitchFamily="18" charset="0"/>
+              </a:rPr>
+            </a:br>
+            <a:r>
+              <a:rPr lang="en-US" sz="2800" dirty="0">
+                <a:solidFill>
+                  <a:schemeClr val="tx1"/>
+                </a:solidFill>
+                <a:latin typeface="Times New Roman" panose="02020603050405020304" pitchFamily="18" charset="0"/>
+                <a:cs typeface="Times New Roman" panose="02020603050405020304" pitchFamily="18" charset="0"/>
+              </a:rPr>
+              <a:t>It will explain the major factors behind each prediction and provide country-comparison and recommendation views through a web-based interface.</a:t>
             </a:r>
           </a:p>
         </p:txBody>
@@ -6685,12 +7259,146 @@
             <p:ph sz="quarter" idx="13"/>
           </p:nvPr>
         </p:nvSpPr>
-        <p:spPr/>
-        <p:txBody>
-          <a:bodyPr/>
-          <a:lstStyle/>
-          <a:p>
-            <a:endParaRPr lang="en-US" dirty="0"/>
+        <p:spPr>
+          <a:xfrm>
+            <a:off x="609600" y="1447800"/>
+            <a:ext cx="10972800" cy="3962400"/>
+          </a:xfrm>
+        </p:spPr>
+        <p:txBody>
+          <a:bodyPr>
+            <a:normAutofit/>
+          </a:bodyPr>
+          <a:lstStyle/>
+          <a:p>
+            <a:pPr marL="0" indent="0">
+              <a:buNone/>
+            </a:pPr>
+            <a:r>
+              <a:rPr lang="en-US" sz="2800" dirty="0">
+                <a:solidFill>
+                  <a:schemeClr val="tx1"/>
+                </a:solidFill>
+                <a:latin typeface="Times New Roman" panose="02020603050405020304" pitchFamily="18" charset="0"/>
+                <a:cs typeface="Times New Roman" panose="02020603050405020304" pitchFamily="18" charset="0"/>
+              </a:rPr>
+              <a:t>• Global HDI with Explainable AI integrates human-development data with a personalized readiness assessment.</a:t>
+            </a:r>
+            <a:br>
+              <a:rPr lang="en-US" sz="2800" dirty="0">
+                <a:solidFill>
+                  <a:schemeClr val="tx1"/>
+                </a:solidFill>
+                <a:latin typeface="Times New Roman" panose="02020603050405020304" pitchFamily="18" charset="0"/>
+                <a:cs typeface="Times New Roman" panose="02020603050405020304" pitchFamily="18" charset="0"/>
+              </a:rPr>
+            </a:br>
+            <a:r>
+              <a:rPr lang="en-US" sz="2800" dirty="0">
+                <a:solidFill>
+                  <a:schemeClr val="tx1"/>
+                </a:solidFill>
+                <a:latin typeface="Times New Roman" panose="02020603050405020304" pitchFamily="18" charset="0"/>
+                <a:cs typeface="Times New Roman" panose="02020603050405020304" pitchFamily="18" charset="0"/>
+              </a:rPr>
+              <a:t>• The project combines data engineering, regression modeling, </a:t>
+            </a:r>
+            <a:r>
+              <a:rPr lang="en-US" sz="2800" dirty="0" err="1">
+                <a:solidFill>
+                  <a:schemeClr val="tx1"/>
+                </a:solidFill>
+                <a:latin typeface="Times New Roman" panose="02020603050405020304" pitchFamily="18" charset="0"/>
+                <a:cs typeface="Times New Roman" panose="02020603050405020304" pitchFamily="18" charset="0"/>
+              </a:rPr>
+              <a:t>explainability</a:t>
+            </a:r>
+            <a:r>
+              <a:rPr lang="en-US" sz="2800" dirty="0">
+                <a:solidFill>
+                  <a:schemeClr val="tx1"/>
+                </a:solidFill>
+                <a:latin typeface="Times New Roman" panose="02020603050405020304" pitchFamily="18" charset="0"/>
+                <a:cs typeface="Times New Roman" panose="02020603050405020304" pitchFamily="18" charset="0"/>
+              </a:rPr>
+              <a:t>, API development, and frontend visualization.</a:t>
+            </a:r>
+            <a:br>
+              <a:rPr lang="en-US" sz="2800" dirty="0">
+                <a:solidFill>
+                  <a:schemeClr val="tx1"/>
+                </a:solidFill>
+                <a:latin typeface="Times New Roman" panose="02020603050405020304" pitchFamily="18" charset="0"/>
+                <a:cs typeface="Times New Roman" panose="02020603050405020304" pitchFamily="18" charset="0"/>
+              </a:rPr>
+            </a:br>
+            <a:r>
+              <a:rPr lang="en-US" sz="2800" dirty="0">
+                <a:solidFill>
+                  <a:schemeClr val="tx1"/>
+                </a:solidFill>
+                <a:latin typeface="Times New Roman" panose="02020603050405020304" pitchFamily="18" charset="0"/>
+                <a:cs typeface="Times New Roman" panose="02020603050405020304" pitchFamily="18" charset="0"/>
+              </a:rPr>
+              <a:t>• Explainable predictions improve transparency and help users understand model outputs.</a:t>
+            </a:r>
+            <a:br>
+              <a:rPr lang="en-US" sz="2800" dirty="0">
+                <a:solidFill>
+                  <a:schemeClr val="tx1"/>
+                </a:solidFill>
+                <a:latin typeface="Times New Roman" panose="02020603050405020304" pitchFamily="18" charset="0"/>
+                <a:cs typeface="Times New Roman" panose="02020603050405020304" pitchFamily="18" charset="0"/>
+              </a:rPr>
+            </a:br>
+            <a:r>
+              <a:rPr lang="en-US" sz="2800" dirty="0">
+                <a:solidFill>
+                  <a:schemeClr val="tx1"/>
+                </a:solidFill>
+                <a:latin typeface="Times New Roman" panose="02020603050405020304" pitchFamily="18" charset="0"/>
+                <a:cs typeface="Times New Roman" panose="02020603050405020304" pitchFamily="18" charset="0"/>
+              </a:rPr>
+              <a:t>• Automated data refresh and model selection support maintainability.</a:t>
+            </a:r>
+            <a:br>
+              <a:rPr lang="en-US" sz="2800" dirty="0">
+                <a:solidFill>
+                  <a:schemeClr val="tx1"/>
+                </a:solidFill>
+                <a:latin typeface="Times New Roman" panose="02020603050405020304" pitchFamily="18" charset="0"/>
+                <a:cs typeface="Times New Roman" panose="02020603050405020304" pitchFamily="18" charset="0"/>
+              </a:rPr>
+            </a:br>
+            <a:r>
+              <a:rPr lang="en-US" sz="2800" dirty="0">
+                <a:solidFill>
+                  <a:schemeClr val="tx1"/>
+                </a:solidFill>
+                <a:latin typeface="Times New Roman" panose="02020603050405020304" pitchFamily="18" charset="0"/>
+                <a:cs typeface="Times New Roman" panose="02020603050405020304" pitchFamily="18" charset="0"/>
+              </a:rPr>
+              <a:t>• The system is a decision-support prototype, not official admission, visa, immigration, financial, or policy advice.</a:t>
+            </a:r>
+            <a:endParaRPr lang="en-US" sz="2800" b="1" dirty="0">
+              <a:solidFill>
+                <a:schemeClr val="tx1"/>
+              </a:solidFill>
+              <a:latin typeface="Times New Roman" panose="02020603050405020304" pitchFamily="18" charset="0"/>
+              <a:cs typeface="Times New Roman" panose="02020603050405020304" pitchFamily="18" charset="0"/>
+            </a:endParaRPr>
+          </a:p>
+          <a:p>
+            <a:pPr marL="0" indent="0">
+              <a:buNone/>
+            </a:pPr>
+            <a:endParaRPr lang="en-US" sz="2800" dirty="0">
+              <a:solidFill>
+                <a:schemeClr val="tx1"/>
+              </a:solidFill>
+              <a:latin typeface="Times New Roman" panose="02020603050405020304" pitchFamily="18" charset="0"/>
+              <a:cs typeface="Times New Roman" panose="02020603050405020304" pitchFamily="18" charset="0"/>
+            </a:endParaRPr>
           </a:p>
         </p:txBody>
       </p:sp>
@@ -6726,43 +7434,20 @@
       </p:grpSpPr>
       <p:sp>
         <p:nvSpPr>
-          <p:cNvPr id="2" name="Title 1"/>
-          <p:cNvSpPr>
-            <a:spLocks noGrp="1"/>
-          </p:cNvSpPr>
-          <p:nvPr>
-            <p:ph type="title"/>
+          <p:cNvPr id="3" name="Content Placeholder 2"/>
+          <p:cNvSpPr>
+            <a:spLocks noGrp="1"/>
+          </p:cNvSpPr>
+          <p:nvPr>
+            <p:ph sz="quarter" idx="13"/>
           </p:nvPr>
         </p:nvSpPr>
         <p:spPr>
           <a:xfrm>
-            <a:off x="1981200" y="274638"/>
-            <a:ext cx="8229600" cy="868362"/>
+            <a:off x="577921" y="990600"/>
+            <a:ext cx="10972800" cy="3962400"/>
           </a:xfrm>
         </p:spPr>
-        <p:txBody>
-          <a:bodyPr/>
-          <a:lstStyle/>
-          <a:p>
-            <a:endParaRPr lang="en-US" dirty="0">
-              <a:solidFill>
-                <a:srgbClr val="7030A0"/>
-              </a:solidFill>
-            </a:endParaRPr>
-          </a:p>
-        </p:txBody>
-      </p:sp>
-      <p:sp>
-        <p:nvSpPr>
-          <p:cNvPr id="3" name="Content Placeholder 2"/>
-          <p:cNvSpPr>
-            <a:spLocks noGrp="1"/>
-          </p:cNvSpPr>
-          <p:nvPr>
-            <p:ph sz="quarter" idx="13"/>
-          </p:nvPr>
-        </p:nvSpPr>
-        <p:spPr/>
         <p:txBody>
           <a:bodyPr>
             <a:normAutofit/>
